--- a/bioinformatics_day2_AM.pptx
+++ b/bioinformatics_day2_AM.pptx
@@ -315,7 +315,7 @@
           <a:p>
             <a:fld id="{5BCAD085-E8A6-8845-BD4E-CB4CCA059FC4}" type="datetimeFigureOut">
               <a:rPr lang="en-US" smtClean="0"/>
-              <a:t>7/5/2026</a:t>
+              <a:t>8/6/2026</a:t>
             </a:fld>
             <a:endParaRPr lang="en-US"/>
           </a:p>
@@ -483,7 +483,7 @@
           <a:p>
             <a:fld id="{5BCAD085-E8A6-8845-BD4E-CB4CCA059FC4}" type="datetimeFigureOut">
               <a:rPr lang="en-US" smtClean="0"/>
-              <a:t>7/5/2026</a:t>
+              <a:t>8/6/2026</a:t>
             </a:fld>
             <a:endParaRPr lang="en-US"/>
           </a:p>
@@ -661,7 +661,7 @@
           <a:p>
             <a:fld id="{5BCAD085-E8A6-8845-BD4E-CB4CCA059FC4}" type="datetimeFigureOut">
               <a:rPr lang="en-US" smtClean="0"/>
-              <a:t>7/5/2026</a:t>
+              <a:t>8/6/2026</a:t>
             </a:fld>
             <a:endParaRPr lang="en-US"/>
           </a:p>
@@ -829,7 +829,7 @@
           <a:p>
             <a:fld id="{5BCAD085-E8A6-8845-BD4E-CB4CCA059FC4}" type="datetimeFigureOut">
               <a:rPr lang="en-US" smtClean="0"/>
-              <a:t>7/5/2026</a:t>
+              <a:t>8/6/2026</a:t>
             </a:fld>
             <a:endParaRPr lang="en-US"/>
           </a:p>
@@ -1074,7 +1074,7 @@
           <a:p>
             <a:fld id="{5BCAD085-E8A6-8845-BD4E-CB4CCA059FC4}" type="datetimeFigureOut">
               <a:rPr lang="en-US" smtClean="0"/>
-              <a:t>7/5/2026</a:t>
+              <a:t>8/6/2026</a:t>
             </a:fld>
             <a:endParaRPr lang="en-US"/>
           </a:p>
@@ -1359,7 +1359,7 @@
           <a:p>
             <a:fld id="{5BCAD085-E8A6-8845-BD4E-CB4CCA059FC4}" type="datetimeFigureOut">
               <a:rPr lang="en-US" smtClean="0"/>
-              <a:t>7/5/2026</a:t>
+              <a:t>8/6/2026</a:t>
             </a:fld>
             <a:endParaRPr lang="en-US"/>
           </a:p>
@@ -1778,7 +1778,7 @@
           <a:p>
             <a:fld id="{5BCAD085-E8A6-8845-BD4E-CB4CCA059FC4}" type="datetimeFigureOut">
               <a:rPr lang="en-US" smtClean="0"/>
-              <a:t>7/5/2026</a:t>
+              <a:t>8/6/2026</a:t>
             </a:fld>
             <a:endParaRPr lang="en-US"/>
           </a:p>
@@ -1895,7 +1895,7 @@
           <a:p>
             <a:fld id="{5BCAD085-E8A6-8845-BD4E-CB4CCA059FC4}" type="datetimeFigureOut">
               <a:rPr lang="en-US" smtClean="0"/>
-              <a:t>7/5/2026</a:t>
+              <a:t>8/6/2026</a:t>
             </a:fld>
             <a:endParaRPr lang="en-US"/>
           </a:p>
@@ -1990,7 +1990,7 @@
           <a:p>
             <a:fld id="{5BCAD085-E8A6-8845-BD4E-CB4CCA059FC4}" type="datetimeFigureOut">
               <a:rPr lang="en-US" smtClean="0"/>
-              <a:t>7/5/2026</a:t>
+              <a:t>8/6/2026</a:t>
             </a:fld>
             <a:endParaRPr lang="en-US"/>
           </a:p>
@@ -2265,7 +2265,7 @@
           <a:p>
             <a:fld id="{5BCAD085-E8A6-8845-BD4E-CB4CCA059FC4}" type="datetimeFigureOut">
               <a:rPr lang="en-US" smtClean="0"/>
-              <a:t>7/5/2026</a:t>
+              <a:t>8/6/2026</a:t>
             </a:fld>
             <a:endParaRPr lang="en-US"/>
           </a:p>
@@ -2517,7 +2517,7 @@
           <a:p>
             <a:fld id="{5BCAD085-E8A6-8845-BD4E-CB4CCA059FC4}" type="datetimeFigureOut">
               <a:rPr lang="en-US" smtClean="0"/>
-              <a:t>7/5/2026</a:t>
+              <a:t>8/6/2026</a:t>
             </a:fld>
             <a:endParaRPr lang="en-US"/>
           </a:p>
@@ -2737,7 +2737,7 @@
           <a:p>
             <a:fld id="{5BCAD085-E8A6-8845-BD4E-CB4CCA059FC4}" type="datetimeFigureOut">
               <a:rPr lang="en-US" smtClean="0"/>
-              <a:t>7/5/2026</a:t>
+              <a:t>8/6/2026</a:t>
             </a:fld>
             <a:endParaRPr lang="en-US"/>
           </a:p>
@@ -4806,7 +4806,7 @@
                 <a:ea typeface="Meiryo UI" panose="020B0604030504040204" pitchFamily="50" charset="-128"/>
                 <a:cs typeface="Yu Gothic" pitchFamily="34" charset="-120"/>
               </a:rPr>
-              <a:t>bioinformatics_2-1.ipynbを開きます</a:t>
+              <a:t>bioinformatics_2-AM_1.ipynbを開きます</a:t>
             </a:r>
             <a:endParaRPr lang="en-US" dirty="0">
               <a:latin typeface="Meiryo UI" panose="020B0604030504040204" pitchFamily="50" charset="-128"/>
